--- a/docs/slides/tiya-website-recommendations.pptx
+++ b/docs/slides/tiya-website-recommendations.pptx
@@ -5408,7 +5408,7 @@
                 <a:ea typeface="Noto Sans TC" pitchFamily="34" charset="-122"/>
                 <a:cs typeface="Noto Sans TC" pitchFamily="34" charset="-120"/>
               </a:rPr>
-              <a:t>加入 Threads 連結（協會已有官方帳號）。</a:t>
+              <a:t>已加入 Threads 連結（2026-05-17 完成）。</a:t>
             </a:r>
             <a:endParaRPr lang="en-US" sz="1500" dirty="0"/>
           </a:p>
@@ -11469,7 +11469,7 @@
                 <a:ea typeface="Noto Sans TC" pitchFamily="34" charset="-122"/>
                 <a:cs typeface="Noto Sans TC" pitchFamily="34" charset="-120"/>
               </a:rPr>
-              <a:t>FB、IG、Email</a:t>
+              <a:t>FB、IG、Threads、Email</a:t>
             </a:r>
             <a:endParaRPr lang="en-US" sz="1600" dirty="0"/>
           </a:p>
@@ -11508,7 +11508,7 @@
                 <a:ea typeface="Noto Sans TC" pitchFamily="34" charset="-122"/>
                 <a:cs typeface="Noto Sans TC" pitchFamily="34" charset="-120"/>
               </a:rPr>
-              <a:t>✅ 可加 Threads</a:t>
+              <a:t>✅</a:t>
             </a:r>
             <a:endParaRPr lang="en-US" sz="1600" dirty="0"/>
           </a:p>
